--- a/mobile課題/クイズのような勉強アプリ.pptx
+++ b/mobile課題/クイズのような勉強アプリ.pptx
@@ -8,6 +8,8 @@
     <p:sldId id="256" r:id="rId2"/>
     <p:sldId id="257" r:id="rId3"/>
     <p:sldId id="258" r:id="rId4"/>
+    <p:sldId id="259" r:id="rId5"/>
+    <p:sldId id="260" r:id="rId6"/>
   </p:sldIdLst>
   <p:sldSz cx="12192000" cy="6858000"/>
   <p:notesSz cx="6858000" cy="9144000"/>
@@ -106,6 +108,11 @@
       </a:defRPr>
     </a:lvl9pPr>
   </p:defaultTextStyle>
+  <p:extLst>
+    <p:ext uri="{EFAFB233-063F-42B5-8137-9DF3F51BA10A}">
+      <p15:sldGuideLst xmlns:p15="http://schemas.microsoft.com/office/powerpoint/2012/main"/>
+    </p:ext>
+  </p:extLst>
 </p:presentation>
 </file>
 
@@ -256,7 +263,7 @@
           <a:p>
             <a:fld id="{3E58A3B8-F98C-4B7F-A277-D3C32A67830A}" type="datetimeFigureOut">
               <a:rPr kumimoji="1" lang="ja-JP" altLang="en-US" smtClean="0"/>
-              <a:t>2026/1/21</a:t>
+              <a:t>2026/5/13</a:t>
             </a:fld>
             <a:endParaRPr kumimoji="1" lang="ja-JP" altLang="en-US"/>
           </a:p>
@@ -486,7 +493,7 @@
           <a:p>
             <a:fld id="{3E58A3B8-F98C-4B7F-A277-D3C32A67830A}" type="datetimeFigureOut">
               <a:rPr kumimoji="1" lang="ja-JP" altLang="en-US" smtClean="0"/>
-              <a:t>2026/1/21</a:t>
+              <a:t>2026/5/13</a:t>
             </a:fld>
             <a:endParaRPr kumimoji="1" lang="ja-JP" altLang="en-US"/>
           </a:p>
@@ -726,7 +733,7 @@
           <a:p>
             <a:fld id="{3E58A3B8-F98C-4B7F-A277-D3C32A67830A}" type="datetimeFigureOut">
               <a:rPr kumimoji="1" lang="ja-JP" altLang="en-US" smtClean="0"/>
-              <a:t>2026/1/21</a:t>
+              <a:t>2026/5/13</a:t>
             </a:fld>
             <a:endParaRPr kumimoji="1" lang="ja-JP" altLang="en-US"/>
           </a:p>
@@ -956,7 +963,7 @@
           <a:p>
             <a:fld id="{3E58A3B8-F98C-4B7F-A277-D3C32A67830A}" type="datetimeFigureOut">
               <a:rPr kumimoji="1" lang="ja-JP" altLang="en-US" smtClean="0"/>
-              <a:t>2026/1/21</a:t>
+              <a:t>2026/5/13</a:t>
             </a:fld>
             <a:endParaRPr kumimoji="1" lang="ja-JP" altLang="en-US"/>
           </a:p>
@@ -1231,7 +1238,7 @@
           <a:p>
             <a:fld id="{3E58A3B8-F98C-4B7F-A277-D3C32A67830A}" type="datetimeFigureOut">
               <a:rPr kumimoji="1" lang="ja-JP" altLang="en-US" smtClean="0"/>
-              <a:t>2026/1/21</a:t>
+              <a:t>2026/5/13</a:t>
             </a:fld>
             <a:endParaRPr kumimoji="1" lang="ja-JP" altLang="en-US"/>
           </a:p>
@@ -1560,7 +1567,7 @@
           <a:p>
             <a:fld id="{3E58A3B8-F98C-4B7F-A277-D3C32A67830A}" type="datetimeFigureOut">
               <a:rPr kumimoji="1" lang="ja-JP" altLang="en-US" smtClean="0"/>
-              <a:t>2026/1/21</a:t>
+              <a:t>2026/5/13</a:t>
             </a:fld>
             <a:endParaRPr kumimoji="1" lang="ja-JP" altLang="en-US"/>
           </a:p>
@@ -2036,7 +2043,7 @@
           <a:p>
             <a:fld id="{3E58A3B8-F98C-4B7F-A277-D3C32A67830A}" type="datetimeFigureOut">
               <a:rPr kumimoji="1" lang="ja-JP" altLang="en-US" smtClean="0"/>
-              <a:t>2026/1/21</a:t>
+              <a:t>2026/5/13</a:t>
             </a:fld>
             <a:endParaRPr kumimoji="1" lang="ja-JP" altLang="en-US"/>
           </a:p>
@@ -2177,7 +2184,7 @@
           <a:p>
             <a:fld id="{3E58A3B8-F98C-4B7F-A277-D3C32A67830A}" type="datetimeFigureOut">
               <a:rPr kumimoji="1" lang="ja-JP" altLang="en-US" smtClean="0"/>
-              <a:t>2026/1/21</a:t>
+              <a:t>2026/5/13</a:t>
             </a:fld>
             <a:endParaRPr kumimoji="1" lang="ja-JP" altLang="en-US"/>
           </a:p>
@@ -2290,7 +2297,7 @@
           <a:p>
             <a:fld id="{3E58A3B8-F98C-4B7F-A277-D3C32A67830A}" type="datetimeFigureOut">
               <a:rPr kumimoji="1" lang="ja-JP" altLang="en-US" smtClean="0"/>
-              <a:t>2026/1/21</a:t>
+              <a:t>2026/5/13</a:t>
             </a:fld>
             <a:endParaRPr kumimoji="1" lang="ja-JP" altLang="en-US"/>
           </a:p>
@@ -2633,7 +2640,7 @@
           <a:p>
             <a:fld id="{3E58A3B8-F98C-4B7F-A277-D3C32A67830A}" type="datetimeFigureOut">
               <a:rPr kumimoji="1" lang="ja-JP" altLang="en-US" smtClean="0"/>
-              <a:t>2026/1/21</a:t>
+              <a:t>2026/5/13</a:t>
             </a:fld>
             <a:endParaRPr kumimoji="1" lang="ja-JP" altLang="en-US"/>
           </a:p>
@@ -2921,7 +2928,7 @@
           <a:p>
             <a:fld id="{3E58A3B8-F98C-4B7F-A277-D3C32A67830A}" type="datetimeFigureOut">
               <a:rPr kumimoji="1" lang="ja-JP" altLang="en-US" smtClean="0"/>
-              <a:t>2026/1/21</a:t>
+              <a:t>2026/5/13</a:t>
             </a:fld>
             <a:endParaRPr kumimoji="1" lang="ja-JP" altLang="en-US"/>
           </a:p>
@@ -3194,7 +3201,7 @@
           <a:p>
             <a:fld id="{3E58A3B8-F98C-4B7F-A277-D3C32A67830A}" type="datetimeFigureOut">
               <a:rPr kumimoji="1" lang="ja-JP" altLang="en-US" smtClean="0"/>
-              <a:t>2026/1/21</a:t>
+              <a:t>2026/5/13</a:t>
             </a:fld>
             <a:endParaRPr kumimoji="1" lang="ja-JP" altLang="en-US"/>
           </a:p>
@@ -4041,6 +4048,189 @@
     <p:extLst>
       <p:ext uri="{BB962C8B-B14F-4D97-AF65-F5344CB8AC3E}">
         <p14:creationId xmlns:p14="http://schemas.microsoft.com/office/powerpoint/2010/main" val="3112788222"/>
+      </p:ext>
+    </p:extLst>
+  </p:cSld>
+  <p:clrMapOvr>
+    <a:masterClrMapping/>
+  </p:clrMapOvr>
+</p:sld>
+</file>
+
+<file path=ppt/slides/slide4.xml><?xml version="1.0" encoding="utf-8"?>
+<p:sld xmlns:a="http://schemas.openxmlformats.org/drawingml/2006/main" xmlns:r="http://schemas.openxmlformats.org/officeDocument/2006/relationships" xmlns:p="http://schemas.openxmlformats.org/presentationml/2006/main">
+  <p:cSld>
+    <p:spTree>
+      <p:nvGrpSpPr>
+        <p:cNvPr id="1" name=""/>
+        <p:cNvGrpSpPr/>
+        <p:nvPr/>
+      </p:nvGrpSpPr>
+      <p:grpSpPr>
+        <a:xfrm>
+          <a:off x="0" y="0"/>
+          <a:ext cx="0" cy="0"/>
+          <a:chOff x="0" y="0"/>
+          <a:chExt cx="0" cy="0"/>
+        </a:xfrm>
+      </p:grpSpPr>
+      <p:sp>
+        <p:nvSpPr>
+          <p:cNvPr id="2" name="タイトル 1">
+            <a:extLst>
+              <a:ext uri="{FF2B5EF4-FFF2-40B4-BE49-F238E27FC236}">
+                <a16:creationId xmlns:a16="http://schemas.microsoft.com/office/drawing/2014/main" id="{82D2C1A5-E393-537F-2331-48CE50EDB204}"/>
+              </a:ext>
+            </a:extLst>
+          </p:cNvPr>
+          <p:cNvSpPr>
+            <a:spLocks noGrp="1"/>
+          </p:cNvSpPr>
+          <p:nvPr>
+            <p:ph type="title"/>
+          </p:nvPr>
+        </p:nvSpPr>
+        <p:spPr/>
+        <p:txBody>
+          <a:bodyPr/>
+          <a:lstStyle/>
+          <a:p>
+            <a:r>
+              <a:rPr kumimoji="1" lang="ja-JP" altLang="en-US" dirty="0"/>
+              <a:t>実機説明</a:t>
+            </a:r>
+          </a:p>
+        </p:txBody>
+      </p:sp>
+      <p:sp>
+        <p:nvSpPr>
+          <p:cNvPr id="3" name="コンテンツ プレースホルダー 2">
+            <a:extLst>
+              <a:ext uri="{FF2B5EF4-FFF2-40B4-BE49-F238E27FC236}">
+                <a16:creationId xmlns:a16="http://schemas.microsoft.com/office/drawing/2014/main" id="{1352CF30-81DA-C1FC-A94B-9DC55EF181AE}"/>
+              </a:ext>
+            </a:extLst>
+          </p:cNvPr>
+          <p:cNvSpPr>
+            <a:spLocks noGrp="1"/>
+          </p:cNvSpPr>
+          <p:nvPr>
+            <p:ph idx="1"/>
+          </p:nvPr>
+        </p:nvSpPr>
+        <p:spPr/>
+        <p:txBody>
+          <a:bodyPr/>
+          <a:lstStyle/>
+          <a:p>
+            <a:endParaRPr kumimoji="1" lang="ja-JP" altLang="en-US"/>
+          </a:p>
+        </p:txBody>
+      </p:sp>
+    </p:spTree>
+    <p:extLst>
+      <p:ext uri="{BB962C8B-B14F-4D97-AF65-F5344CB8AC3E}">
+        <p14:creationId xmlns:p14="http://schemas.microsoft.com/office/powerpoint/2010/main" val="2627037484"/>
+      </p:ext>
+    </p:extLst>
+  </p:cSld>
+  <p:clrMapOvr>
+    <a:masterClrMapping/>
+  </p:clrMapOvr>
+</p:sld>
+</file>
+
+<file path=ppt/slides/slide5.xml><?xml version="1.0" encoding="utf-8"?>
+<p:sld xmlns:a="http://schemas.openxmlformats.org/drawingml/2006/main" xmlns:r="http://schemas.openxmlformats.org/officeDocument/2006/relationships" xmlns:p="http://schemas.openxmlformats.org/presentationml/2006/main">
+  <p:cSld>
+    <p:spTree>
+      <p:nvGrpSpPr>
+        <p:cNvPr id="1" name=""/>
+        <p:cNvGrpSpPr/>
+        <p:nvPr/>
+      </p:nvGrpSpPr>
+      <p:grpSpPr>
+        <a:xfrm>
+          <a:off x="0" y="0"/>
+          <a:ext cx="0" cy="0"/>
+          <a:chOff x="0" y="0"/>
+          <a:chExt cx="0" cy="0"/>
+        </a:xfrm>
+      </p:grpSpPr>
+      <p:sp>
+        <p:nvSpPr>
+          <p:cNvPr id="2" name="タイトル 1">
+            <a:extLst>
+              <a:ext uri="{FF2B5EF4-FFF2-40B4-BE49-F238E27FC236}">
+                <a16:creationId xmlns:a16="http://schemas.microsoft.com/office/drawing/2014/main" id="{A18DDFFA-5DB1-38DE-B3D6-8A103AE2E261}"/>
+              </a:ext>
+            </a:extLst>
+          </p:cNvPr>
+          <p:cNvSpPr>
+            <a:spLocks noGrp="1"/>
+          </p:cNvSpPr>
+          <p:nvPr>
+            <p:ph type="title"/>
+          </p:nvPr>
+        </p:nvSpPr>
+        <p:spPr/>
+        <p:txBody>
+          <a:bodyPr/>
+          <a:lstStyle/>
+          <a:p>
+            <a:r>
+              <a:rPr kumimoji="1" lang="ja-JP" altLang="en-US" dirty="0"/>
+              <a:t>搭載したい機能</a:t>
+            </a:r>
+          </a:p>
+        </p:txBody>
+      </p:sp>
+      <p:sp>
+        <p:nvSpPr>
+          <p:cNvPr id="3" name="コンテンツ プレースホルダー 2">
+            <a:extLst>
+              <a:ext uri="{FF2B5EF4-FFF2-40B4-BE49-F238E27FC236}">
+                <a16:creationId xmlns:a16="http://schemas.microsoft.com/office/drawing/2014/main" id="{9815F032-C610-8A13-5518-0C9DE10451DC}"/>
+              </a:ext>
+            </a:extLst>
+          </p:cNvPr>
+          <p:cNvSpPr>
+            <a:spLocks noGrp="1"/>
+          </p:cNvSpPr>
+          <p:nvPr>
+            <p:ph idx="1"/>
+          </p:nvPr>
+        </p:nvSpPr>
+        <p:spPr/>
+        <p:txBody>
+          <a:bodyPr/>
+          <a:lstStyle/>
+          <a:p>
+            <a:r>
+              <a:rPr kumimoji="1" lang="ja-JP" altLang="en-US" dirty="0"/>
+              <a:t>アプリを落としても問題を保存させる機能</a:t>
+            </a:r>
+            <a:endParaRPr kumimoji="1" lang="en-US" altLang="ja-JP" dirty="0"/>
+          </a:p>
+          <a:p>
+            <a:r>
+              <a:rPr lang="ja-JP" altLang="en-US" dirty="0"/>
+              <a:t>科目分野に細分化して保存できる機能</a:t>
+            </a:r>
+            <a:endParaRPr lang="en-US" altLang="ja-JP" dirty="0"/>
+          </a:p>
+          <a:p>
+            <a:r>
+              <a:rPr kumimoji="1" lang="ja-JP" altLang="en-US"/>
+              <a:t>選択肢の数を変更できる機能</a:t>
+            </a:r>
+          </a:p>
+        </p:txBody>
+      </p:sp>
+    </p:spTree>
+    <p:extLst>
+      <p:ext uri="{BB962C8B-B14F-4D97-AF65-F5344CB8AC3E}">
+        <p14:creationId xmlns:p14="http://schemas.microsoft.com/office/powerpoint/2010/main" val="2710277842"/>
       </p:ext>
     </p:extLst>
   </p:cSld>
